--- a/classes/parte-4-seguridad-de-aplicaciones-web/099-server-side-request-forgery-ssrf/clase-099-presentacion.pptx
+++ b/classes/parte-4-seguridad-de-aplicaciones-web/099-server-side-request-forgery-ssrf/clase-099-presentacion.pptx
@@ -17,6 +17,9 @@
     <p:sldId id="265" r:id="rId16"/>
     <p:sldId id="266" r:id="rId17"/>
     <p:sldId id="267" r:id="rId18"/>
+    <p:sldId id="268" r:id="rId19"/>
+    <p:sldId id="269" r:id="rId20"/>
+    <p:sldId id="270" r:id="rId21"/>
   </p:sldIdLst>
   <p:sldSz cx="9144000" cy="6858000" type="screen4x3"/>
   <p:notesSz cx="6858000" cy="9144000"/>
@@ -3198,7 +3201,7 @@
                   <a:srgbClr val="0B3D2E"/>
                 </a:solidFill>
               </a:rPr>
-              <a:t>⚠️ Errores comunes</a:t>
+              <a:t>✍️ Ejercicios</a:t>
             </a:r>
           </a:p>
         </p:txBody>
@@ -3236,67 +3239,82 @@
                   <a:srgbClr val="22282E"/>
                 </a:solidFill>
               </a:rPr>
-              <a:t>•  El servidor no sigue la URL — La feature valida el destino; busca otra función</a:t>
-            </a:r>
-          </a:p>
-          <a:p>
-            <a:pPr>
-              <a:spcAft>
-                <a:spcPts val="600"/>
-              </a:spcAft>
-            </a:pPr>
-            <a:r>
-              <a:rPr sz="1500">
-                <a:solidFill>
-                  <a:srgbClr val="22282E"/>
-                </a:solidFill>
-              </a:rPr>
-              <a:t>•  Bloqueado localhost — Usa 127.1, [::1], decimal o DNS que resuelva a interno</a:t>
-            </a:r>
-          </a:p>
-          <a:p>
-            <a:pPr>
-              <a:spcAft>
-                <a:spcPts val="600"/>
-              </a:spcAft>
-            </a:pPr>
-            <a:r>
-              <a:rPr sz="1500">
-                <a:solidFill>
-                  <a:srgbClr val="22282E"/>
-                </a:solidFill>
-              </a:rPr>
-              <a:t>•  Sin respuesta visible — SSRF ciega; confirma con OOB</a:t>
-            </a:r>
-          </a:p>
-          <a:p>
-            <a:pPr>
-              <a:spcAft>
-                <a:spcPts val="600"/>
-              </a:spcAft>
-            </a:pPr>
-            <a:r>
-              <a:rPr sz="1500">
-                <a:solidFill>
-                  <a:srgbClr val="22282E"/>
-                </a:solidFill>
-              </a:rPr>
-              <a:t>•  Redirección no ayuda — La app no sigue redirecciones; prueba otro vector</a:t>
-            </a:r>
-          </a:p>
-          <a:p>
-            <a:pPr>
-              <a:spcAft>
-                <a:spcPts val="600"/>
-              </a:spcAft>
-            </a:pPr>
-            <a:r>
-              <a:rPr sz="1500">
-                <a:solidFill>
-                  <a:srgbClr val="22282E"/>
-                </a:solidFill>
-              </a:rPr>
-              <a:t>•  Metadata devuelve 401 — IMDSv2 requiere token; ajusta la técnica</a:t>
+              <a:t>•  Enumera 5 features típicas que introducen SSRF.</a:t>
+            </a:r>
+          </a:p>
+          <a:p>
+            <a:pPr>
+              <a:spcAft>
+                <a:spcPts val="600"/>
+              </a:spcAft>
+            </a:pPr>
+            <a:r>
+              <a:rPr sz="1500">
+                <a:solidFill>
+                  <a:srgbClr val="22282E"/>
+                </a:solidFill>
+              </a:rPr>
+              <a:t>•  Explica por qué el endpoint de metadata es tan crítico.</a:t>
+            </a:r>
+          </a:p>
+          <a:p>
+            <a:pPr>
+              <a:spcAft>
+                <a:spcPts val="600"/>
+              </a:spcAft>
+            </a:pPr>
+            <a:r>
+              <a:rPr sz="1500">
+                <a:solidFill>
+                  <a:srgbClr val="22282E"/>
+                </a:solidFill>
+              </a:rPr>
+              <a:t>•  Evade un blocklist de 127.0.0.1 de tres formas distintas.</a:t>
+            </a:r>
+          </a:p>
+          <a:p>
+            <a:pPr>
+              <a:spcAft>
+                <a:spcPts val="600"/>
+              </a:spcAft>
+            </a:pPr>
+            <a:r>
+              <a:rPr sz="1500">
+                <a:solidFill>
+                  <a:srgbClr val="22282E"/>
+                </a:solidFill>
+              </a:rPr>
+              <a:t>•  Usa una redirección abierta para saltar un allowlist de dominios.</a:t>
+            </a:r>
+          </a:p>
+          <a:p>
+            <a:pPr>
+              <a:spcAft>
+                <a:spcPts val="600"/>
+              </a:spcAft>
+            </a:pPr>
+            <a:r>
+              <a:rPr sz="1500">
+                <a:solidFill>
+                  <a:srgbClr val="22282E"/>
+                </a:solidFill>
+              </a:rPr>
+              <a:t>•  Diferencia SSRF de CSRF con claridad.</a:t>
+            </a:r>
+          </a:p>
+          <a:p>
+            <a:pPr>
+              <a:spcAft>
+                <a:spcPts val="600"/>
+              </a:spcAft>
+            </a:pPr>
+            <a:r>
+              <a:rPr sz="1500">
+                <a:solidFill>
+                  <a:srgbClr val="22282E"/>
+                </a:solidFill>
+              </a:rPr>
+              <a:t>•  Diseña una defensa: allowlist de destinos + bloqueo de IPs privadas + no seguir redirecciones.</a:t>
             </a:r>
           </a:p>
         </p:txBody>
@@ -3347,7 +3365,7 @@
                   <a:srgbClr val="0B3D2E"/>
                 </a:solidFill>
               </a:rPr>
-              <a:t>❓ Preguntas frecuentes</a:t>
+              <a:t>📝 Reto verificable</a:t>
             </a:r>
           </a:p>
         </p:txBody>
@@ -3385,82 +3403,22 @@
                   <a:srgbClr val="22282E"/>
                 </a:solidFill>
               </a:rPr>
-              <a:t>•  ❓ ¿Por qué SSRF es tan grave en cloud?</a:t>
-            </a:r>
-          </a:p>
-          <a:p>
-            <a:pPr>
-              <a:spcAft>
-                <a:spcPts val="600"/>
-              </a:spcAft>
-            </a:pPr>
-            <a:r>
-              <a:rPr sz="1500">
-                <a:solidFill>
-                  <a:srgbClr val="22282E"/>
-                </a:solidFill>
-              </a:rPr>
-              <a:t>•  Porque el endpoint de metadata entrega credenciales de la instancia; con ellas, el atacante puede pivotar a toda la cuenta cloud.</a:t>
-            </a:r>
-          </a:p>
-          <a:p>
-            <a:pPr>
-              <a:spcAft>
-                <a:spcPts val="600"/>
-              </a:spcAft>
-            </a:pPr>
-            <a:r>
-              <a:rPr sz="1500">
-                <a:solidFill>
-                  <a:srgbClr val="22282E"/>
-                </a:solidFill>
-              </a:rPr>
-              <a:t>•  ❓ ¿IMDSv2 resuelve el SSRF?</a:t>
-            </a:r>
-          </a:p>
-          <a:p>
-            <a:pPr>
-              <a:spcAft>
-                <a:spcPts val="600"/>
-              </a:spcAft>
-            </a:pPr>
-            <a:r>
-              <a:rPr sz="1500">
-                <a:solidFill>
-                  <a:srgbClr val="22282E"/>
-                </a:solidFill>
-              </a:rPr>
-              <a:t>•  Lo mitiga exigiendo un token PUT previo, más difícil de lograr vía SSRF simple, pero no elimina todos los vectores.</a:t>
-            </a:r>
-          </a:p>
-          <a:p>
-            <a:pPr>
-              <a:spcAft>
-                <a:spcPts val="600"/>
-              </a:spcAft>
-            </a:pPr>
-            <a:r>
-              <a:rPr sz="1500">
-                <a:solidFill>
-                  <a:srgbClr val="22282E"/>
-                </a:solidFill>
-              </a:rPr>
-              <a:t>•  ❓ ¿Basta con un blocklist de IPs?</a:t>
-            </a:r>
-          </a:p>
-          <a:p>
-            <a:pPr>
-              <a:spcAft>
-                <a:spcPts val="600"/>
-              </a:spcAft>
-            </a:pPr>
-            <a:r>
-              <a:rPr sz="1500">
-                <a:solidFill>
-                  <a:srgbClr val="22282E"/>
-                </a:solidFill>
-              </a:rPr>
-              <a:t>•  No. Los blocklists se evaden fácil. Usa allowlists de destinos y bloquea rangos privados a nivel de red.</a:t>
+              <a:t>•  Resuelve un lab de SSRF de PortSwigger que exija acceder al endpoint de metadata y usa las credenciales obtenidas para completar el objetivo del lab.</a:t>
+            </a:r>
+          </a:p>
+          <a:p>
+            <a:pPr>
+              <a:spcAft>
+                <a:spcPts val="600"/>
+              </a:spcAft>
+            </a:pPr>
+            <a:r>
+              <a:rPr sz="1500">
+                <a:solidFill>
+                  <a:srgbClr val="22282E"/>
+                </a:solidFill>
+              </a:rPr>
+              <a:t>•  Criterio de aceptación: el lab queda resuelto, entregas la URL de SSRF, las credenciales/dato extraído y explicas la defensa (allowlist, bloqueo de rangos internos) que lo evitaría.</a:t>
             </a:r>
           </a:p>
         </p:txBody>
@@ -3511,7 +3469,7 @@
                   <a:srgbClr val="0B3D2E"/>
                 </a:solidFill>
               </a:rPr>
-              <a:t>🔗 Referencias</a:t>
+              <a:t>⚠️ Errores comunes</a:t>
             </a:r>
           </a:p>
         </p:txBody>
@@ -3549,6 +3507,319 @@
                   <a:srgbClr val="22282E"/>
                 </a:solidFill>
               </a:rPr>
+              <a:t>•  El servidor no sigue la URL — La feature valida el destino; busca otra función</a:t>
+            </a:r>
+          </a:p>
+          <a:p>
+            <a:pPr>
+              <a:spcAft>
+                <a:spcPts val="600"/>
+              </a:spcAft>
+            </a:pPr>
+            <a:r>
+              <a:rPr sz="1500">
+                <a:solidFill>
+                  <a:srgbClr val="22282E"/>
+                </a:solidFill>
+              </a:rPr>
+              <a:t>•  Bloqueado localhost — Usa 127.1, [::1], decimal o DNS que resuelva a interno</a:t>
+            </a:r>
+          </a:p>
+          <a:p>
+            <a:pPr>
+              <a:spcAft>
+                <a:spcPts val="600"/>
+              </a:spcAft>
+            </a:pPr>
+            <a:r>
+              <a:rPr sz="1500">
+                <a:solidFill>
+                  <a:srgbClr val="22282E"/>
+                </a:solidFill>
+              </a:rPr>
+              <a:t>•  Sin respuesta visible — SSRF ciega; confirma con OOB</a:t>
+            </a:r>
+          </a:p>
+          <a:p>
+            <a:pPr>
+              <a:spcAft>
+                <a:spcPts val="600"/>
+              </a:spcAft>
+            </a:pPr>
+            <a:r>
+              <a:rPr sz="1500">
+                <a:solidFill>
+                  <a:srgbClr val="22282E"/>
+                </a:solidFill>
+              </a:rPr>
+              <a:t>•  Redirección no ayuda — La app no sigue redirecciones; prueba otro vector</a:t>
+            </a:r>
+          </a:p>
+          <a:p>
+            <a:pPr>
+              <a:spcAft>
+                <a:spcPts val="600"/>
+              </a:spcAft>
+            </a:pPr>
+            <a:r>
+              <a:rPr sz="1500">
+                <a:solidFill>
+                  <a:srgbClr val="22282E"/>
+                </a:solidFill>
+              </a:rPr>
+              <a:t>•  Metadata devuelve 401 — IMDSv2 requiere token; ajusta la técnica</a:t>
+            </a:r>
+          </a:p>
+        </p:txBody>
+      </p:sp>
+    </p:spTree>
+  </p:cSld>
+  <p:clrMapOvr>
+    <a:masterClrMapping/>
+  </p:clrMapOvr>
+</p:sld>
+</file>
+
+<file path=ppt/slides/slide13.xml><?xml version="1.0" encoding="utf-8"?>
+<p:sld xmlns:a="http://schemas.openxmlformats.org/drawingml/2006/main" xmlns:p="http://schemas.openxmlformats.org/presentationml/2006/main" xmlns:r="http://schemas.openxmlformats.org/officeDocument/2006/relationships">
+  <p:cSld>
+    <p:spTree>
+      <p:nvGrpSpPr>
+        <p:cNvPr id="1" name=""/>
+        <p:cNvGrpSpPr/>
+        <p:nvPr/>
+      </p:nvGrpSpPr>
+      <p:grpSpPr/>
+      <p:sp>
+        <p:nvSpPr>
+          <p:cNvPr id="2" name="TextBox 1"/>
+          <p:cNvSpPr txBox="1"/>
+          <p:nvPr/>
+        </p:nvSpPr>
+        <p:spPr>
+          <a:xfrm>
+            <a:off x="457200" y="320040"/>
+            <a:ext cx="8229600" cy="822960"/>
+          </a:xfrm>
+          <a:prstGeom prst="rect">
+            <a:avLst/>
+          </a:prstGeom>
+          <a:noFill/>
+        </p:spPr>
+        <p:txBody>
+          <a:bodyPr wrap="square">
+            <a:spAutoFit/>
+          </a:bodyPr>
+          <a:lstStyle/>
+          <a:p>
+            <a:r>
+              <a:rPr sz="2600" b="1">
+                <a:solidFill>
+                  <a:srgbClr val="0B3D2E"/>
+                </a:solidFill>
+              </a:rPr>
+              <a:t>❓ Preguntas frecuentes</a:t>
+            </a:r>
+          </a:p>
+        </p:txBody>
+      </p:sp>
+      <p:sp>
+        <p:nvSpPr>
+          <p:cNvPr id="3" name="TextBox 2"/>
+          <p:cNvSpPr txBox="1"/>
+          <p:nvPr/>
+        </p:nvSpPr>
+        <p:spPr>
+          <a:xfrm>
+            <a:off x="457200" y="1280160"/>
+            <a:ext cx="8229600" cy="4937760"/>
+          </a:xfrm>
+          <a:prstGeom prst="rect">
+            <a:avLst/>
+          </a:prstGeom>
+          <a:noFill/>
+        </p:spPr>
+        <p:txBody>
+          <a:bodyPr wrap="square">
+            <a:spAutoFit/>
+          </a:bodyPr>
+          <a:lstStyle/>
+          <a:p>
+            <a:pPr>
+              <a:spcAft>
+                <a:spcPts val="600"/>
+              </a:spcAft>
+            </a:pPr>
+            <a:r>
+              <a:rPr sz="1500">
+                <a:solidFill>
+                  <a:srgbClr val="22282E"/>
+                </a:solidFill>
+              </a:rPr>
+              <a:t>•  ❓ ¿Por qué SSRF es tan grave en cloud?</a:t>
+            </a:r>
+          </a:p>
+          <a:p>
+            <a:pPr>
+              <a:spcAft>
+                <a:spcPts val="600"/>
+              </a:spcAft>
+            </a:pPr>
+            <a:r>
+              <a:rPr sz="1500">
+                <a:solidFill>
+                  <a:srgbClr val="22282E"/>
+                </a:solidFill>
+              </a:rPr>
+              <a:t>•  Porque el endpoint de metadata entrega credenciales de la instancia; con ellas, el atacante puede pivotar a toda la cuenta cloud.</a:t>
+            </a:r>
+          </a:p>
+          <a:p>
+            <a:pPr>
+              <a:spcAft>
+                <a:spcPts val="600"/>
+              </a:spcAft>
+            </a:pPr>
+            <a:r>
+              <a:rPr sz="1500">
+                <a:solidFill>
+                  <a:srgbClr val="22282E"/>
+                </a:solidFill>
+              </a:rPr>
+              <a:t>•  ❓ ¿IMDSv2 resuelve el SSRF?</a:t>
+            </a:r>
+          </a:p>
+          <a:p>
+            <a:pPr>
+              <a:spcAft>
+                <a:spcPts val="600"/>
+              </a:spcAft>
+            </a:pPr>
+            <a:r>
+              <a:rPr sz="1500">
+                <a:solidFill>
+                  <a:srgbClr val="22282E"/>
+                </a:solidFill>
+              </a:rPr>
+              <a:t>•  Lo mitiga exigiendo un token PUT previo, más difícil de lograr vía SSRF simple, pero no elimina todos los vectores.</a:t>
+            </a:r>
+          </a:p>
+          <a:p>
+            <a:pPr>
+              <a:spcAft>
+                <a:spcPts val="600"/>
+              </a:spcAft>
+            </a:pPr>
+            <a:r>
+              <a:rPr sz="1500">
+                <a:solidFill>
+                  <a:srgbClr val="22282E"/>
+                </a:solidFill>
+              </a:rPr>
+              <a:t>•  ❓ ¿Basta con un blocklist de IPs?</a:t>
+            </a:r>
+          </a:p>
+          <a:p>
+            <a:pPr>
+              <a:spcAft>
+                <a:spcPts val="600"/>
+              </a:spcAft>
+            </a:pPr>
+            <a:r>
+              <a:rPr sz="1500">
+                <a:solidFill>
+                  <a:srgbClr val="22282E"/>
+                </a:solidFill>
+              </a:rPr>
+              <a:t>•  No. Los blocklists se evaden fácil. Usa allowlists de destinos y bloquea rangos privados a nivel de red.</a:t>
+            </a:r>
+          </a:p>
+        </p:txBody>
+      </p:sp>
+    </p:spTree>
+  </p:cSld>
+  <p:clrMapOvr>
+    <a:masterClrMapping/>
+  </p:clrMapOvr>
+</p:sld>
+</file>
+
+<file path=ppt/slides/slide14.xml><?xml version="1.0" encoding="utf-8"?>
+<p:sld xmlns:a="http://schemas.openxmlformats.org/drawingml/2006/main" xmlns:p="http://schemas.openxmlformats.org/presentationml/2006/main" xmlns:r="http://schemas.openxmlformats.org/officeDocument/2006/relationships">
+  <p:cSld>
+    <p:spTree>
+      <p:nvGrpSpPr>
+        <p:cNvPr id="1" name=""/>
+        <p:cNvGrpSpPr/>
+        <p:nvPr/>
+      </p:nvGrpSpPr>
+      <p:grpSpPr/>
+      <p:sp>
+        <p:nvSpPr>
+          <p:cNvPr id="2" name="TextBox 1"/>
+          <p:cNvSpPr txBox="1"/>
+          <p:nvPr/>
+        </p:nvSpPr>
+        <p:spPr>
+          <a:xfrm>
+            <a:off x="457200" y="320040"/>
+            <a:ext cx="8229600" cy="822960"/>
+          </a:xfrm>
+          <a:prstGeom prst="rect">
+            <a:avLst/>
+          </a:prstGeom>
+          <a:noFill/>
+        </p:spPr>
+        <p:txBody>
+          <a:bodyPr wrap="square">
+            <a:spAutoFit/>
+          </a:bodyPr>
+          <a:lstStyle/>
+          <a:p>
+            <a:r>
+              <a:rPr sz="2600" b="1">
+                <a:solidFill>
+                  <a:srgbClr val="0B3D2E"/>
+                </a:solidFill>
+              </a:rPr>
+              <a:t>🔗 Referencias</a:t>
+            </a:r>
+          </a:p>
+        </p:txBody>
+      </p:sp>
+      <p:sp>
+        <p:nvSpPr>
+          <p:cNvPr id="3" name="TextBox 2"/>
+          <p:cNvSpPr txBox="1"/>
+          <p:nvPr/>
+        </p:nvSpPr>
+        <p:spPr>
+          <a:xfrm>
+            <a:off x="457200" y="1280160"/>
+            <a:ext cx="8229600" cy="4937760"/>
+          </a:xfrm>
+          <a:prstGeom prst="rect">
+            <a:avLst/>
+          </a:prstGeom>
+          <a:noFill/>
+        </p:spPr>
+        <p:txBody>
+          <a:bodyPr wrap="square">
+            <a:spAutoFit/>
+          </a:bodyPr>
+          <a:lstStyle/>
+          <a:p>
+            <a:pPr>
+              <a:spcAft>
+                <a:spcPts val="600"/>
+              </a:spcAft>
+            </a:pPr>
+            <a:r>
+              <a:rPr sz="1500">
+                <a:solidFill>
+                  <a:srgbClr val="22282E"/>
+                </a:solidFill>
+              </a:rPr>
               <a:t>•  Yaworski, Real-World Bug Hunting, cap. de SSRF.</a:t>
             </a:r>
           </a:p>
@@ -3599,6 +3870,81 @@
           </a:p>
         </p:txBody>
       </p:sp>
+    </p:spTree>
+  </p:cSld>
+  <p:clrMapOvr>
+    <a:masterClrMapping/>
+  </p:clrMapOvr>
+</p:sld>
+</file>
+
+<file path=ppt/slides/slide15.xml><?xml version="1.0" encoding="utf-8"?>
+<p:sld xmlns:a="http://schemas.openxmlformats.org/drawingml/2006/main" xmlns:p="http://schemas.openxmlformats.org/presentationml/2006/main" xmlns:r="http://schemas.openxmlformats.org/officeDocument/2006/relationships">
+  <p:cSld>
+    <p:spTree>
+      <p:nvGrpSpPr>
+        <p:cNvPr id="1" name=""/>
+        <p:cNvGrpSpPr/>
+        <p:nvPr/>
+      </p:nvGrpSpPr>
+      <p:grpSpPr/>
+      <p:sp>
+        <p:nvSpPr>
+          <p:cNvPr id="2" name="TextBox 1"/>
+          <p:cNvSpPr txBox="1"/>
+          <p:nvPr/>
+        </p:nvSpPr>
+        <p:spPr>
+          <a:xfrm>
+            <a:off x="457200" y="274320"/>
+            <a:ext cx="8229600" cy="640080"/>
+          </a:xfrm>
+          <a:prstGeom prst="rect">
+            <a:avLst/>
+          </a:prstGeom>
+          <a:noFill/>
+        </p:spPr>
+        <p:txBody>
+          <a:bodyPr wrap="square">
+            <a:spAutoFit/>
+          </a:bodyPr>
+          <a:lstStyle/>
+          <a:p>
+            <a:r>
+              <a:rPr sz="2200" b="1">
+                <a:solidFill>
+                  <a:srgbClr val="0B3D2E"/>
+                </a:solidFill>
+              </a:rPr>
+              <a:t>Diagrama de la clase</a:t>
+            </a:r>
+          </a:p>
+        </p:txBody>
+      </p:sp>
+      <p:pic>
+        <p:nvPicPr>
+          <p:cNvPr id="3" name="Picture 2" descr="01d43cec21bf7c90.png"/>
+          <p:cNvPicPr>
+            <a:picLocks noChangeAspect="1"/>
+          </p:cNvPicPr>
+          <p:nvPr/>
+        </p:nvPicPr>
+        <p:blipFill>
+          <a:blip r:embed="rId2"/>
+          <a:stretch>
+            <a:fillRect/>
+          </a:stretch>
+        </p:blipFill>
+        <p:spPr>
+          <a:xfrm>
+            <a:off x="457200" y="2706624"/>
+            <a:ext cx="8229600" cy="2084832"/>
+          </a:xfrm>
+          <a:prstGeom prst="rect">
+            <a:avLst/>
+          </a:prstGeom>
+        </p:spPr>
+      </p:pic>
     </p:spTree>
   </p:cSld>
   <p:clrMapOvr>
@@ -3683,7 +4029,7 @@
                   <a:srgbClr val="22282E"/>
                 </a:solidFill>
               </a:rPr>
-              <a:t>•  Explotar el SSRF (falsificación de petición del lado servidor): hacer que el servidor realice peticiones a destinos que el atacante controla, incluyendo servicios internos y endpoints de metadata cloud. Es una de las vulnerabilidades de mayor impacto en entornos modernos y una categoría propia del OWASP Top 10.</a:t>
+              <a:t>•  Explotar el SSRF (falsificación de petición del lado servidor): hacer que el servidor realice peticiones a destinos que el atacante controla, incluyendo servicios internos y endpoints de metadata…</a:t>
             </a:r>
           </a:p>
         </p:txBody>
@@ -4077,7 +4423,7 @@
                   <a:srgbClr val="0B3D2E"/>
                 </a:solidFill>
               </a:rPr>
-              <a:t>📖 Definiciones y características</a:t>
+              <a:t>🧠 Explicación en profundidad</a:t>
             </a:r>
           </a:p>
         </p:txBody>
@@ -4115,82 +4461,97 @@
                   <a:srgbClr val="22282E"/>
                 </a:solidFill>
               </a:rPr>
-              <a:t>•  SSRF: el servidor hace una petición a una URL controlada por el atacante. Característica: usa la posición de red del servidor.</a:t>
-            </a:r>
-          </a:p>
-          <a:p>
-            <a:pPr>
-              <a:spcAft>
-                <a:spcPts val="600"/>
-              </a:spcAft>
-            </a:pPr>
-            <a:r>
-              <a:rPr sz="1500">
-                <a:solidFill>
-                  <a:srgbClr val="22282E"/>
-                </a:solidFill>
-              </a:rPr>
-              <a:t>•  Metadata endpoint: servicio cloud interno que entrega credenciales temporales (AWS/GCP/Azure). Característica: solo accesible desde la instancia, ideal objetivo de SSRF.</a:t>
-            </a:r>
-          </a:p>
-          <a:p>
-            <a:pPr>
-              <a:spcAft>
-                <a:spcPts val="600"/>
-              </a:spcAft>
-            </a:pPr>
-            <a:r>
-              <a:rPr sz="1500">
-                <a:solidFill>
-                  <a:srgbClr val="22282E"/>
-                </a:solidFill>
-              </a:rPr>
-              <a:t>•  SSRF ciega: no se ve la respuesta; se confirma por interacción OOB. Característica: requiere Collaborator/servidor propio.</a:t>
-            </a:r>
-          </a:p>
-          <a:p>
-            <a:pPr>
-              <a:spcAft>
-                <a:spcPts val="600"/>
-              </a:spcAft>
-            </a:pPr>
-            <a:r>
-              <a:rPr sz="1500">
-                <a:solidFill>
-                  <a:srgbClr val="22282E"/>
-                </a:solidFill>
-              </a:rPr>
-              <a:t>•  Bypass de filtro: técnicas para saltar allow/blocklists (IP decimal, DNS rebinding, redirecciones). Característica: los filtros por string son frágiles.</a:t>
-            </a:r>
-          </a:p>
-          <a:p>
-            <a:pPr>
-              <a:spcAft>
-                <a:spcPts val="600"/>
-              </a:spcAft>
-            </a:pPr>
-            <a:r>
-              <a:rPr sz="1500">
-                <a:solidFill>
-                  <a:srgbClr val="22282E"/>
-                </a:solidFill>
-              </a:rPr>
-              <a:t>•  Esquema de URL: http, file, gopher, dict. Característica: esquemas exóticos amplían lo que se puede hacer.</a:t>
-            </a:r>
-          </a:p>
-          <a:p>
-            <a:pPr>
-              <a:spcAft>
-                <a:spcPts val="600"/>
-              </a:spcAft>
-            </a:pPr>
-            <a:r>
-              <a:rPr sz="1500">
-                <a:solidFill>
-                  <a:srgbClr val="22282E"/>
-                </a:solidFill>
-              </a:rPr>
-              <a:t>•  DNS rebinding: cambiar la resolución DNS tras la validación. Característica: evade filtros basados en resolver una vez.</a:t>
+              <a:t>•  El Server-Side Request Forgery ocurre cuando una aplicación toma una URL controlada por el</a:t>
+            </a:r>
+          </a:p>
+          <a:p>
+            <a:pPr>
+              <a:spcAft>
+                <a:spcPts val="600"/>
+              </a:spcAft>
+            </a:pPr>
+            <a:r>
+              <a:rPr sz="1500">
+                <a:solidFill>
+                  <a:srgbClr val="22282E"/>
+                </a:solidFill>
+              </a:rPr>
+              <a:t>•  usuario y hace una petición a ella desde el servidor. La aplicación tiene funciones legítimas</a:t>
+            </a:r>
+          </a:p>
+          <a:p>
+            <a:pPr>
+              <a:spcAft>
+                <a:spcPts val="600"/>
+              </a:spcAft>
+            </a:pPr>
+            <a:r>
+              <a:rPr sz="1500">
+                <a:solidFill>
+                  <a:srgbClr val="22282E"/>
+                </a:solidFill>
+              </a:rPr>
+              <a:t>•  que hacen esto —cargar una imagen desde una URL, un webhook, importar datos de un enlace, un</a:t>
+            </a:r>
+          </a:p>
+          <a:p>
+            <a:pPr>
+              <a:spcAft>
+                <a:spcPts val="600"/>
+              </a:spcAft>
+            </a:pPr>
+            <a:r>
+              <a:rPr sz="1500">
+                <a:solidFill>
+                  <a:srgbClr val="22282E"/>
+                </a:solidFill>
+              </a:rPr>
+              <a:t>•  generador de miniaturas—, y el abuso consiste en darle una URL que apunte no a Internet, sino a</a:t>
+            </a:r>
+          </a:p>
+          <a:p>
+            <a:pPr>
+              <a:spcAft>
+                <a:spcPts val="600"/>
+              </a:spcAft>
+            </a:pPr>
+            <a:r>
+              <a:rPr sz="1500">
+                <a:solidFill>
+                  <a:srgbClr val="22282E"/>
+                </a:solidFill>
+              </a:rPr>
+              <a:t>•  sitios que el atacante no puede alcanzar directamente pero el servidor sí. El servidor se</a:t>
+            </a:r>
+          </a:p>
+          <a:p>
+            <a:pPr>
+              <a:spcAft>
+                <a:spcPts val="600"/>
+              </a:spcAft>
+            </a:pPr>
+            <a:r>
+              <a:rPr sz="1500">
+                <a:solidFill>
+                  <a:srgbClr val="22282E"/>
+                </a:solidFill>
+              </a:rPr>
+              <a:t>•  convierte, en efecto, en un proxy hacia la red interna. Su gravedad hizo que OWASP lo añadiera</a:t>
+            </a:r>
+          </a:p>
+          <a:p>
+            <a:pPr>
+              <a:spcAft>
+                <a:spcPts val="600"/>
+              </a:spcAft>
+            </a:pPr>
+            <a:r>
+              <a:rPr sz="1500">
+                <a:solidFill>
+                  <a:srgbClr val="22282E"/>
+                </a:solidFill>
+              </a:rPr>
+              <a:t>•  como categoría propia (A10) en 2021.</a:t>
             </a:r>
           </a:p>
         </p:txBody>
@@ -4241,7 +4602,7 @@
                   <a:srgbClr val="0B3D2E"/>
                 </a:solidFill>
               </a:rPr>
-              <a:t>🧰 Herramientas y preparación</a:t>
+              <a:t>📖 Definiciones y características</a:t>
             </a:r>
           </a:p>
         </p:txBody>
@@ -4279,37 +4640,82 @@
                   <a:srgbClr val="22282E"/>
                 </a:solidFill>
               </a:rPr>
-              <a:t>•  PortSwigger labs de SSRF y Juice Shop.</a:t>
-            </a:r>
-          </a:p>
-          <a:p>
-            <a:pPr>
-              <a:spcAft>
-                <a:spcPts val="600"/>
-              </a:spcAft>
-            </a:pPr>
-            <a:r>
-              <a:rPr sz="1500">
-                <a:solidFill>
-                  <a:srgbClr val="22282E"/>
-                </a:solidFill>
-              </a:rPr>
-              <a:t>•  Burp Collaborator o servidor propio para OOB.</a:t>
-            </a:r>
-          </a:p>
-          <a:p>
-            <a:pPr>
-              <a:spcAft>
-                <a:spcPts val="600"/>
-              </a:spcAft>
-            </a:pPr>
-            <a:r>
-              <a:rPr sz="1500">
-                <a:solidFill>
-                  <a:srgbClr val="22282E"/>
-                </a:solidFill>
-              </a:rPr>
-              <a:t>•  Conocer los endpoints de metadata de cada nube (documentación oficial).</a:t>
+              <a:t>•  SSRF: el servidor hace una petición a una URL controlada por el atacante. Característica: usa la posición de red del servidor.</a:t>
+            </a:r>
+          </a:p>
+          <a:p>
+            <a:pPr>
+              <a:spcAft>
+                <a:spcPts val="600"/>
+              </a:spcAft>
+            </a:pPr>
+            <a:r>
+              <a:rPr sz="1500">
+                <a:solidFill>
+                  <a:srgbClr val="22282E"/>
+                </a:solidFill>
+              </a:rPr>
+              <a:t>•  Metadata endpoint: servicio cloud interno que entrega credenciales temporales (AWS/GCP/Azure). Característica: solo accesible desde la instancia, ideal objetivo de SSRF.</a:t>
+            </a:r>
+          </a:p>
+          <a:p>
+            <a:pPr>
+              <a:spcAft>
+                <a:spcPts val="600"/>
+              </a:spcAft>
+            </a:pPr>
+            <a:r>
+              <a:rPr sz="1500">
+                <a:solidFill>
+                  <a:srgbClr val="22282E"/>
+                </a:solidFill>
+              </a:rPr>
+              <a:t>•  SSRF ciega: no se ve la respuesta; se confirma por interacción OOB. Característica: requiere Collaborator/servidor propio.</a:t>
+            </a:r>
+          </a:p>
+          <a:p>
+            <a:pPr>
+              <a:spcAft>
+                <a:spcPts val="600"/>
+              </a:spcAft>
+            </a:pPr>
+            <a:r>
+              <a:rPr sz="1500">
+                <a:solidFill>
+                  <a:srgbClr val="22282E"/>
+                </a:solidFill>
+              </a:rPr>
+              <a:t>•  Bypass de filtro: técnicas para saltar allow/blocklists (IP decimal, DNS rebinding, redirecciones). Característica: los filtros por string son frágiles.</a:t>
+            </a:r>
+          </a:p>
+          <a:p>
+            <a:pPr>
+              <a:spcAft>
+                <a:spcPts val="600"/>
+              </a:spcAft>
+            </a:pPr>
+            <a:r>
+              <a:rPr sz="1500">
+                <a:solidFill>
+                  <a:srgbClr val="22282E"/>
+                </a:solidFill>
+              </a:rPr>
+              <a:t>•  Esquema de URL: http, file, gopher, dict. Característica: esquemas exóticos amplían lo que se puede hacer.</a:t>
+            </a:r>
+          </a:p>
+          <a:p>
+            <a:pPr>
+              <a:spcAft>
+                <a:spcPts val="600"/>
+              </a:spcAft>
+            </a:pPr>
+            <a:r>
+              <a:rPr sz="1500">
+                <a:solidFill>
+                  <a:srgbClr val="22282E"/>
+                </a:solidFill>
+              </a:rPr>
+              <a:t>•  DNS rebinding: cambiar la resolución DNS tras la validación. Característica: evade filtros basados en resolver una vez.</a:t>
             </a:r>
           </a:p>
         </p:txBody>
@@ -4360,7 +4766,7 @@
                   <a:srgbClr val="0B3D2E"/>
                 </a:solidFill>
               </a:rPr>
-              <a:t>🧪 Laboratorio guiado</a:t>
+              <a:t>📔 Glosario</a:t>
             </a:r>
           </a:p>
         </p:txBody>
@@ -4398,97 +4804,97 @@
                   <a:srgbClr val="22282E"/>
                 </a:solidFill>
               </a:rPr>
-              <a:t>•  Localiza una función que reciba una URL (importar imagen, webhook, comprobar stock).</a:t>
-            </a:r>
-          </a:p>
-          <a:p>
-            <a:pPr>
-              <a:spcAft>
-                <a:spcPts val="600"/>
-              </a:spcAft>
-            </a:pPr>
-            <a:r>
-              <a:rPr sz="1500">
-                <a:solidFill>
-                  <a:srgbClr val="22282E"/>
-                </a:solidFill>
-              </a:rPr>
-              <a:t>•  Cambia la URL a http://localhost/admin y observa si el servidor la alcanza.</a:t>
-            </a:r>
-          </a:p>
-          <a:p>
-            <a:pPr>
-              <a:spcAft>
-                <a:spcPts val="600"/>
-              </a:spcAft>
-            </a:pPr>
-            <a:r>
-              <a:rPr sz="1500">
-                <a:solidFill>
-                  <a:srgbClr val="22282E"/>
-                </a:solidFill>
-              </a:rPr>
-              <a:t>•  Escanea puertos internos cambiando el puerto en la URL y midiendo respuestas/tiempos.</a:t>
-            </a:r>
-          </a:p>
-          <a:p>
-            <a:pPr>
-              <a:spcAft>
-                <a:spcPts val="600"/>
-              </a:spcAft>
-            </a:pPr>
-            <a:r>
-              <a:rPr sz="1500">
-                <a:solidFill>
-                  <a:srgbClr val="22282E"/>
-                </a:solidFill>
-              </a:rPr>
-              <a:t>•  En el lab cloud de PortSwigger, apunta al endpoint de metadata:</a:t>
-            </a:r>
-          </a:p>
-          <a:p>
-            <a:pPr>
-              <a:spcAft>
-                <a:spcPts val="600"/>
-              </a:spcAft>
-            </a:pPr>
-            <a:r>
-              <a:rPr sz="1500">
-                <a:solidFill>
-                  <a:srgbClr val="22282E"/>
-                </a:solidFill>
-              </a:rPr>
-              <a:t>•  http://169.254.169.254/latest/meta-data/iam/security-credentials/</a:t>
-            </a:r>
-          </a:p>
-          <a:p>
-            <a:pPr>
-              <a:spcAft>
-                <a:spcPts val="600"/>
-              </a:spcAft>
-            </a:pPr>
-            <a:r>
-              <a:rPr sz="1500">
-                <a:solidFill>
-                  <a:srgbClr val="22282E"/>
-                </a:solidFill>
-              </a:rPr>
-              <a:t>•  Extrae el rol y luego las credenciales temporales de ese rol.</a:t>
-            </a:r>
-          </a:p>
-          <a:p>
-            <a:pPr>
-              <a:spcAft>
-                <a:spcPts val="600"/>
-              </a:spcAft>
-            </a:pPr>
-            <a:r>
-              <a:rPr sz="1500">
-                <a:solidFill>
-                  <a:srgbClr val="22282E"/>
-                </a:solidFill>
-              </a:rPr>
-              <a:t>•  Para SSRF ciega, apunta la URL a tu Collaborator y confirma la interacción DNS/HTTP.</a:t>
+              <a:t>•  Término — Definición concisa</a:t>
+            </a:r>
+          </a:p>
+          <a:p>
+            <a:pPr>
+              <a:spcAft>
+                <a:spcPts val="600"/>
+              </a:spcAft>
+            </a:pPr>
+            <a:r>
+              <a:rPr sz="1500">
+                <a:solidFill>
+                  <a:srgbClr val="22282E"/>
+                </a:solidFill>
+              </a:rPr>
+              <a:t>•  SSRF — La aplicación hace una petición a una URL que controla el atacante</a:t>
+            </a:r>
+          </a:p>
+          <a:p>
+            <a:pPr>
+              <a:spcAft>
+                <a:spcPts val="600"/>
+              </a:spcAft>
+            </a:pPr>
+            <a:r>
+              <a:rPr sz="1500">
+                <a:solidFill>
+                  <a:srgbClr val="22282E"/>
+                </a:solidFill>
+              </a:rPr>
+              <a:t>•  Proxy hacia dentro — El servidor alcanza lo que el atacante no puede</a:t>
+            </a:r>
+          </a:p>
+          <a:p>
+            <a:pPr>
+              <a:spcAft>
+                <a:spcPts val="600"/>
+              </a:spcAft>
+            </a:pPr>
+            <a:r>
+              <a:rPr sz="1500">
+                <a:solidFill>
+                  <a:srgbClr val="22282E"/>
+                </a:solidFill>
+              </a:rPr>
+              <a:t>•  Servicio de metadatos — 169.254.169.254; devuelve credenciales de la instancia</a:t>
+            </a:r>
+          </a:p>
+          <a:p>
+            <a:pPr>
+              <a:spcAft>
+                <a:spcPts val="600"/>
+              </a:spcAft>
+            </a:pPr>
+            <a:r>
+              <a:rPr sz="1500">
+                <a:solidFill>
+                  <a:srgbClr val="22282E"/>
+                </a:solidFill>
+              </a:rPr>
+              <a:t>•  Capital One — Brecha de 2019 causada por SSRF al metadata de AWS</a:t>
+            </a:r>
+          </a:p>
+          <a:p>
+            <a:pPr>
+              <a:spcAft>
+                <a:spcPts val="600"/>
+              </a:spcAft>
+            </a:pPr>
+            <a:r>
+              <a:rPr sz="1500">
+                <a:solidFill>
+                  <a:srgbClr val="22282E"/>
+                </a:solidFill>
+              </a:rPr>
+              <a:t>•  Red interna — Servicios que confían en el tráfico de dentro</a:t>
+            </a:r>
+          </a:p>
+          <a:p>
+            <a:pPr>
+              <a:spcAft>
+                <a:spcPts val="600"/>
+              </a:spcAft>
+            </a:pPr>
+            <a:r>
+              <a:rPr sz="1500">
+                <a:solidFill>
+                  <a:srgbClr val="22282E"/>
+                </a:solidFill>
+              </a:rPr>
+              <a:t>•  Escaneo interno — Sondear puertos internos por tiempos o errores</a:t>
             </a:r>
           </a:p>
         </p:txBody>
@@ -4539,7 +4945,7 @@
                   <a:srgbClr val="0B3D2E"/>
                 </a:solidFill>
               </a:rPr>
-              <a:t>✍️ Ejercicios</a:t>
+              <a:t>🧰 Herramientas y preparación</a:t>
             </a:r>
           </a:p>
         </p:txBody>
@@ -4577,82 +4983,37 @@
                   <a:srgbClr val="22282E"/>
                 </a:solidFill>
               </a:rPr>
-              <a:t>•  Enumera 5 features típicas que introducen SSRF.</a:t>
-            </a:r>
-          </a:p>
-          <a:p>
-            <a:pPr>
-              <a:spcAft>
-                <a:spcPts val="600"/>
-              </a:spcAft>
-            </a:pPr>
-            <a:r>
-              <a:rPr sz="1500">
-                <a:solidFill>
-                  <a:srgbClr val="22282E"/>
-                </a:solidFill>
-              </a:rPr>
-              <a:t>•  Explica por qué el endpoint de metadata es tan crítico.</a:t>
-            </a:r>
-          </a:p>
-          <a:p>
-            <a:pPr>
-              <a:spcAft>
-                <a:spcPts val="600"/>
-              </a:spcAft>
-            </a:pPr>
-            <a:r>
-              <a:rPr sz="1500">
-                <a:solidFill>
-                  <a:srgbClr val="22282E"/>
-                </a:solidFill>
-              </a:rPr>
-              <a:t>•  Evade un blocklist de 127.0.0.1 de tres formas distintas.</a:t>
-            </a:r>
-          </a:p>
-          <a:p>
-            <a:pPr>
-              <a:spcAft>
-                <a:spcPts val="600"/>
-              </a:spcAft>
-            </a:pPr>
-            <a:r>
-              <a:rPr sz="1500">
-                <a:solidFill>
-                  <a:srgbClr val="22282E"/>
-                </a:solidFill>
-              </a:rPr>
-              <a:t>•  Usa una redirección abierta para saltar un allowlist de dominios.</a:t>
-            </a:r>
-          </a:p>
-          <a:p>
-            <a:pPr>
-              <a:spcAft>
-                <a:spcPts val="600"/>
-              </a:spcAft>
-            </a:pPr>
-            <a:r>
-              <a:rPr sz="1500">
-                <a:solidFill>
-                  <a:srgbClr val="22282E"/>
-                </a:solidFill>
-              </a:rPr>
-              <a:t>•  Diferencia SSRF de CSRF con claridad.</a:t>
-            </a:r>
-          </a:p>
-          <a:p>
-            <a:pPr>
-              <a:spcAft>
-                <a:spcPts val="600"/>
-              </a:spcAft>
-            </a:pPr>
-            <a:r>
-              <a:rPr sz="1500">
-                <a:solidFill>
-                  <a:srgbClr val="22282E"/>
-                </a:solidFill>
-              </a:rPr>
-              <a:t>•  Diseña una defensa: allowlist de destinos + bloqueo de IPs privadas + no seguir redirecciones.</a:t>
+              <a:t>•  PortSwigger labs de SSRF y Juice Shop.</a:t>
+            </a:r>
+          </a:p>
+          <a:p>
+            <a:pPr>
+              <a:spcAft>
+                <a:spcPts val="600"/>
+              </a:spcAft>
+            </a:pPr>
+            <a:r>
+              <a:rPr sz="1500">
+                <a:solidFill>
+                  <a:srgbClr val="22282E"/>
+                </a:solidFill>
+              </a:rPr>
+              <a:t>•  Burp Collaborator o servidor propio para OOB.</a:t>
+            </a:r>
+          </a:p>
+          <a:p>
+            <a:pPr>
+              <a:spcAft>
+                <a:spcPts val="600"/>
+              </a:spcAft>
+            </a:pPr>
+            <a:r>
+              <a:rPr sz="1500">
+                <a:solidFill>
+                  <a:srgbClr val="22282E"/>
+                </a:solidFill>
+              </a:rPr>
+              <a:t>•  Conocer los endpoints de metadata de cada nube (documentación oficial).</a:t>
             </a:r>
           </a:p>
         </p:txBody>
@@ -4703,7 +5064,7 @@
                   <a:srgbClr val="0B3D2E"/>
                 </a:solidFill>
               </a:rPr>
-              <a:t>📝 Reto verificable</a:t>
+              <a:t>🧪 Laboratorio guiado</a:t>
             </a:r>
           </a:p>
         </p:txBody>
@@ -4741,22 +5102,97 @@
                   <a:srgbClr val="22282E"/>
                 </a:solidFill>
               </a:rPr>
-              <a:t>•  Resuelve un lab de SSRF de PortSwigger que exija acceder al endpoint de metadata y usa las credenciales obtenidas para completar el objetivo del lab.</a:t>
-            </a:r>
-          </a:p>
-          <a:p>
-            <a:pPr>
-              <a:spcAft>
-                <a:spcPts val="600"/>
-              </a:spcAft>
-            </a:pPr>
-            <a:r>
-              <a:rPr sz="1500">
-                <a:solidFill>
-                  <a:srgbClr val="22282E"/>
-                </a:solidFill>
-              </a:rPr>
-              <a:t>•  Criterio de aceptación: el lab queda resuelto, entregas la URL de SSRF, las credenciales/dato extraído y explicas la defensa (allowlist, bloqueo de rangos internos) que lo evitaría.</a:t>
+              <a:t>•  Localiza una función que reciba una URL (importar imagen, webhook, comprobar stock).</a:t>
+            </a:r>
+          </a:p>
+          <a:p>
+            <a:pPr>
+              <a:spcAft>
+                <a:spcPts val="600"/>
+              </a:spcAft>
+            </a:pPr>
+            <a:r>
+              <a:rPr sz="1500">
+                <a:solidFill>
+                  <a:srgbClr val="22282E"/>
+                </a:solidFill>
+              </a:rPr>
+              <a:t>•  Cambia la URL a http://localhost/admin y observa si el servidor la alcanza.</a:t>
+            </a:r>
+          </a:p>
+          <a:p>
+            <a:pPr>
+              <a:spcAft>
+                <a:spcPts val="600"/>
+              </a:spcAft>
+            </a:pPr>
+            <a:r>
+              <a:rPr sz="1500">
+                <a:solidFill>
+                  <a:srgbClr val="22282E"/>
+                </a:solidFill>
+              </a:rPr>
+              <a:t>•  Escanea puertos internos cambiando el puerto en la URL y midiendo respuestas/tiempos.</a:t>
+            </a:r>
+          </a:p>
+          <a:p>
+            <a:pPr>
+              <a:spcAft>
+                <a:spcPts val="600"/>
+              </a:spcAft>
+            </a:pPr>
+            <a:r>
+              <a:rPr sz="1500">
+                <a:solidFill>
+                  <a:srgbClr val="22282E"/>
+                </a:solidFill>
+              </a:rPr>
+              <a:t>•  En el lab cloud de PortSwigger, apunta al endpoint de metadata:</a:t>
+            </a:r>
+          </a:p>
+          <a:p>
+            <a:pPr>
+              <a:spcAft>
+                <a:spcPts val="600"/>
+              </a:spcAft>
+            </a:pPr>
+            <a:r>
+              <a:rPr sz="1500">
+                <a:solidFill>
+                  <a:srgbClr val="22282E"/>
+                </a:solidFill>
+              </a:rPr>
+              <a:t>•  Extrae el rol y luego las credenciales temporales de ese rol.</a:t>
+            </a:r>
+          </a:p>
+          <a:p>
+            <a:pPr>
+              <a:spcAft>
+                <a:spcPts val="600"/>
+              </a:spcAft>
+            </a:pPr>
+            <a:r>
+              <a:rPr sz="1500">
+                <a:solidFill>
+                  <a:srgbClr val="22282E"/>
+                </a:solidFill>
+              </a:rPr>
+              <a:t>•  Para SSRF ciega, apunta la URL a tu Collaborator y confirma la interacción DNS/HTTP.</a:t>
+            </a:r>
+          </a:p>
+          <a:p>
+            <a:pPr>
+              <a:spcAft>
+                <a:spcPts val="600"/>
+              </a:spcAft>
+            </a:pPr>
+            <a:r>
+              <a:rPr sz="1500">
+                <a:solidFill>
+                  <a:srgbClr val="22282E"/>
+                </a:solidFill>
+              </a:rPr>
+              <a:t>•  Evade un filtro que bloquea localhost usando 127.1, [::1] o IP en formato decimal.</a:t>
             </a:r>
           </a:p>
         </p:txBody>
